--- a/knf/decks/d3p4.pptx
+++ b/knf/decks/d3p4.pptx
@@ -5634,7 +5634,7 @@
                 <a:ea typeface="Pretendard"/>
                 <a:cs typeface="Pretendard"/>
               </a:rPr>
-              <a:t>45분 뒤에는</a:t>
+              <a:t>50분 뒤에는</a:t>
             </a:r>
           </a:p>
         </p:txBody>

--- a/knf/decks/d3p4.pptx
+++ b/knf/decks/d3p4.pptx
@@ -3100,7 +3100,7 @@
       <p:grpSpPr/>
       <p:sp>
         <p:nvSpPr>
-          <p:cNvPr id="2" name="Oval 1"/>
+          <p:cNvPr id="2" name="deckgen:decor"/>
           <p:cNvSpPr/>
           <p:nvPr/>
         </p:nvSpPr>
@@ -3130,7 +3130,7 @@
       </p:sp>
       <p:sp>
         <p:nvSpPr>
-          <p:cNvPr id="3" name="Oval 2"/>
+          <p:cNvPr id="3" name="deckgen:decor"/>
           <p:cNvSpPr/>
           <p:nvPr/>
         </p:nvSpPr>
@@ -3160,7 +3160,7 @@
       </p:sp>
       <p:sp>
         <p:nvSpPr>
-          <p:cNvPr id="4" name="Oval 3"/>
+          <p:cNvPr id="4" name="deckgen:decor"/>
           <p:cNvSpPr/>
           <p:nvPr/>
         </p:nvSpPr>
@@ -3190,7 +3190,7 @@
       </p:sp>
       <p:sp>
         <p:nvSpPr>
-          <p:cNvPr id="5" name="Rectangle 4"/>
+          <p:cNvPr id="5" name="deckgen:decor"/>
           <p:cNvSpPr/>
           <p:nvPr/>
         </p:nvSpPr>
@@ -3220,7 +3220,7 @@
       </p:sp>
       <p:sp>
         <p:nvSpPr>
-          <p:cNvPr id="6" name="Oval 5"/>
+          <p:cNvPr id="6" name="deckgen:decor"/>
           <p:cNvSpPr/>
           <p:nvPr/>
         </p:nvSpPr>
@@ -3250,7 +3250,7 @@
       </p:sp>
       <p:sp>
         <p:nvSpPr>
-          <p:cNvPr id="7" name="Oval 6"/>
+          <p:cNvPr id="7" name="deckgen:decor"/>
           <p:cNvSpPr/>
           <p:nvPr/>
         </p:nvSpPr>
@@ -3280,7 +3280,7 @@
       </p:sp>
       <p:sp>
         <p:nvSpPr>
-          <p:cNvPr id="8" name="Oval 7"/>
+          <p:cNvPr id="8" name="deckgen:decor"/>
           <p:cNvSpPr/>
           <p:nvPr/>
         </p:nvSpPr>
@@ -3310,7 +3310,7 @@
       </p:sp>
       <p:sp>
         <p:nvSpPr>
-          <p:cNvPr id="9" name="Oval 8"/>
+          <p:cNvPr id="9" name="deckgen:decor"/>
           <p:cNvSpPr/>
           <p:nvPr/>
         </p:nvSpPr>
@@ -3340,7 +3340,7 @@
       </p:sp>
       <p:sp>
         <p:nvSpPr>
-          <p:cNvPr id="10" name="Rectangle 9"/>
+          <p:cNvPr id="10" name="deckgen:decor"/>
           <p:cNvSpPr/>
           <p:nvPr/>
         </p:nvSpPr>
@@ -3600,7 +3600,7 @@
       <p:grpSpPr/>
       <p:sp>
         <p:nvSpPr>
-          <p:cNvPr id="2" name="Oval 1"/>
+          <p:cNvPr id="2" name="deckgen:decor"/>
           <p:cNvSpPr/>
           <p:nvPr/>
         </p:nvSpPr>
@@ -3630,7 +3630,7 @@
       </p:sp>
       <p:sp>
         <p:nvSpPr>
-          <p:cNvPr id="3" name="Oval 2"/>
+          <p:cNvPr id="3" name="deckgen:decor"/>
           <p:cNvSpPr/>
           <p:nvPr/>
         </p:nvSpPr>
@@ -3660,7 +3660,7 @@
       </p:sp>
       <p:sp>
         <p:nvSpPr>
-          <p:cNvPr id="4" name="Oval 3"/>
+          <p:cNvPr id="4" name="deckgen:decor"/>
           <p:cNvSpPr/>
           <p:nvPr/>
         </p:nvSpPr>
@@ -4662,7 +4662,7 @@
       <p:grpSpPr/>
       <p:sp>
         <p:nvSpPr>
-          <p:cNvPr id="2" name="Oval 1"/>
+          <p:cNvPr id="2" name="deckgen:decor"/>
           <p:cNvSpPr/>
           <p:nvPr/>
         </p:nvSpPr>
@@ -4692,7 +4692,7 @@
       </p:sp>
       <p:sp>
         <p:nvSpPr>
-          <p:cNvPr id="3" name="Oval 2"/>
+          <p:cNvPr id="3" name="deckgen:decor"/>
           <p:cNvSpPr/>
           <p:nvPr/>
         </p:nvSpPr>
@@ -5469,7 +5469,7 @@
       <p:grpSpPr/>
       <p:sp>
         <p:nvSpPr>
-          <p:cNvPr id="2" name="Oval 1"/>
+          <p:cNvPr id="2" name="deckgen:decor"/>
           <p:cNvSpPr/>
           <p:nvPr/>
         </p:nvSpPr>
@@ -5499,7 +5499,7 @@
       </p:sp>
       <p:sp>
         <p:nvSpPr>
-          <p:cNvPr id="3" name="Oval 2"/>
+          <p:cNvPr id="3" name="deckgen:decor"/>
           <p:cNvSpPr/>
           <p:nvPr/>
         </p:nvSpPr>
@@ -5529,7 +5529,7 @@
       </p:sp>
       <p:sp>
         <p:nvSpPr>
-          <p:cNvPr id="4" name="Oval 3"/>
+          <p:cNvPr id="4" name="deckgen:decor"/>
           <p:cNvSpPr/>
           <p:nvPr/>
         </p:nvSpPr>
@@ -6314,7 +6314,7 @@
       <p:grpSpPr/>
       <p:sp>
         <p:nvSpPr>
-          <p:cNvPr id="2" name="Oval 1"/>
+          <p:cNvPr id="2" name="deckgen:decor"/>
           <p:cNvSpPr/>
           <p:nvPr/>
         </p:nvSpPr>
@@ -6344,7 +6344,7 @@
       </p:sp>
       <p:sp>
         <p:nvSpPr>
-          <p:cNvPr id="3" name="Oval 2"/>
+          <p:cNvPr id="3" name="deckgen:decor"/>
           <p:cNvSpPr/>
           <p:nvPr/>
         </p:nvSpPr>
@@ -6374,7 +6374,7 @@
       </p:sp>
       <p:sp>
         <p:nvSpPr>
-          <p:cNvPr id="4" name="Oval 3"/>
+          <p:cNvPr id="4" name="deckgen:decor"/>
           <p:cNvSpPr/>
           <p:nvPr/>
         </p:nvSpPr>
@@ -8250,7 +8250,7 @@
       <p:grpSpPr/>
       <p:sp>
         <p:nvSpPr>
-          <p:cNvPr id="2" name="Oval 1"/>
+          <p:cNvPr id="2" name="deckgen:decor"/>
           <p:cNvSpPr/>
           <p:nvPr/>
         </p:nvSpPr>
@@ -8280,7 +8280,7 @@
       </p:sp>
       <p:sp>
         <p:nvSpPr>
-          <p:cNvPr id="3" name="Oval 2"/>
+          <p:cNvPr id="3" name="deckgen:decor"/>
           <p:cNvSpPr/>
           <p:nvPr/>
         </p:nvSpPr>
@@ -8310,7 +8310,7 @@
       </p:sp>
       <p:sp>
         <p:nvSpPr>
-          <p:cNvPr id="4" name="Oval 3"/>
+          <p:cNvPr id="4" name="deckgen:decor"/>
           <p:cNvSpPr/>
           <p:nvPr/>
         </p:nvSpPr>
@@ -9507,7 +9507,7 @@
       <p:grpSpPr/>
       <p:sp>
         <p:nvSpPr>
-          <p:cNvPr id="2" name="Oval 1"/>
+          <p:cNvPr id="2" name="deckgen:decor"/>
           <p:cNvSpPr/>
           <p:nvPr/>
         </p:nvSpPr>
@@ -9537,7 +9537,7 @@
       </p:sp>
       <p:sp>
         <p:nvSpPr>
-          <p:cNvPr id="3" name="Oval 2"/>
+          <p:cNvPr id="3" name="deckgen:decor"/>
           <p:cNvSpPr/>
           <p:nvPr/>
         </p:nvSpPr>
@@ -9567,7 +9567,7 @@
       </p:sp>
       <p:sp>
         <p:nvSpPr>
-          <p:cNvPr id="4" name="Oval 3"/>
+          <p:cNvPr id="4" name="deckgen:decor"/>
           <p:cNvSpPr/>
           <p:nvPr/>
         </p:nvSpPr>
@@ -11006,7 +11006,7 @@
       <p:grpSpPr/>
       <p:sp>
         <p:nvSpPr>
-          <p:cNvPr id="2" name="Oval 1"/>
+          <p:cNvPr id="2" name="deckgen:decor"/>
           <p:cNvSpPr/>
           <p:nvPr/>
         </p:nvSpPr>
@@ -11036,7 +11036,7 @@
       </p:sp>
       <p:sp>
         <p:nvSpPr>
-          <p:cNvPr id="3" name="Oval 2"/>
+          <p:cNvPr id="3" name="deckgen:decor"/>
           <p:cNvSpPr/>
           <p:nvPr/>
         </p:nvSpPr>
@@ -11066,7 +11066,7 @@
       </p:sp>
       <p:sp>
         <p:nvSpPr>
-          <p:cNvPr id="4" name="Oval 3"/>
+          <p:cNvPr id="4" name="deckgen:decor"/>
           <p:cNvSpPr/>
           <p:nvPr/>
         </p:nvSpPr>
@@ -11272,7 +11272,7 @@
       </p:sp>
       <p:sp>
         <p:nvSpPr>
-          <p:cNvPr id="10" name="TextBox 9"/>
+          <p:cNvPr id="10" name="deckgen:ornament"/>
           <p:cNvSpPr txBox="1"/>
           <p:nvPr/>
         </p:nvSpPr>
@@ -11457,7 +11457,7 @@
       </p:sp>
       <p:sp>
         <p:nvSpPr>
-          <p:cNvPr id="14" name="TextBox 13"/>
+          <p:cNvPr id="14" name="deckgen:ornament"/>
           <p:cNvSpPr txBox="1"/>
           <p:nvPr/>
         </p:nvSpPr>
@@ -11642,7 +11642,7 @@
       </p:sp>
       <p:sp>
         <p:nvSpPr>
-          <p:cNvPr id="18" name="TextBox 17"/>
+          <p:cNvPr id="18" name="deckgen:ornament"/>
           <p:cNvSpPr txBox="1"/>
           <p:nvPr/>
         </p:nvSpPr>
@@ -11964,7 +11964,7 @@
       <p:grpSpPr/>
       <p:sp>
         <p:nvSpPr>
-          <p:cNvPr id="2" name="Oval 1"/>
+          <p:cNvPr id="2" name="deckgen:decor"/>
           <p:cNvSpPr/>
           <p:nvPr/>
         </p:nvSpPr>
@@ -11994,7 +11994,7 @@
       </p:sp>
       <p:sp>
         <p:nvSpPr>
-          <p:cNvPr id="3" name="Oval 2"/>
+          <p:cNvPr id="3" name="deckgen:decor"/>
           <p:cNvSpPr/>
           <p:nvPr/>
         </p:nvSpPr>
@@ -12024,7 +12024,7 @@
       </p:sp>
       <p:sp>
         <p:nvSpPr>
-          <p:cNvPr id="4" name="Oval 3"/>
+          <p:cNvPr id="4" name="deckgen:decor"/>
           <p:cNvSpPr/>
           <p:nvPr/>
         </p:nvSpPr>
@@ -13675,7 +13675,7 @@
       <p:grpSpPr/>
       <p:sp>
         <p:nvSpPr>
-          <p:cNvPr id="2" name="Oval 1"/>
+          <p:cNvPr id="2" name="deckgen:decor"/>
           <p:cNvSpPr/>
           <p:nvPr/>
         </p:nvSpPr>
@@ -13705,7 +13705,7 @@
       </p:sp>
       <p:sp>
         <p:nvSpPr>
-          <p:cNvPr id="3" name="Oval 2"/>
+          <p:cNvPr id="3" name="deckgen:decor"/>
           <p:cNvSpPr/>
           <p:nvPr/>
         </p:nvSpPr>
@@ -13735,7 +13735,7 @@
       </p:sp>
       <p:sp>
         <p:nvSpPr>
-          <p:cNvPr id="4" name="Oval 3"/>
+          <p:cNvPr id="4" name="deckgen:decor"/>
           <p:cNvSpPr/>
           <p:nvPr/>
         </p:nvSpPr>
@@ -14795,7 +14795,7 @@
       <p:grpSpPr/>
       <p:sp>
         <p:nvSpPr>
-          <p:cNvPr id="2" name="Oval 1"/>
+          <p:cNvPr id="2" name="deckgen:decor"/>
           <p:cNvSpPr/>
           <p:nvPr/>
         </p:nvSpPr>
@@ -14825,7 +14825,7 @@
       </p:sp>
       <p:sp>
         <p:nvSpPr>
-          <p:cNvPr id="3" name="Oval 2"/>
+          <p:cNvPr id="3" name="deckgen:decor"/>
           <p:cNvSpPr/>
           <p:nvPr/>
         </p:nvSpPr>
@@ -14855,7 +14855,7 @@
       </p:sp>
       <p:sp>
         <p:nvSpPr>
-          <p:cNvPr id="4" name="Oval 3"/>
+          <p:cNvPr id="4" name="deckgen:decor"/>
           <p:cNvSpPr/>
           <p:nvPr/>
         </p:nvSpPr>
